--- a/PresCoach/PresCoach_slides.pptx
+++ b/PresCoach/PresCoach_slides.pptx
@@ -1706,7 +1706,7 @@
           </a:prstGeom>
           <a:extLst>
             <a:ext uri="{C572A759-6A51-4108-AA02-DFA0A04FC94B}">
-              <ma14:wrappingTextBoxFlag xmlns="" xmlns:ma14="http://schemas.microsoft.com/office/mac/drawingml/2011/main" val="0"/>
+              <ma14:wrappingTextBoxFlag xmlns:ma14="http://schemas.microsoft.com/office/mac/drawingml/2011/main" xmlns="" val="0"/>
             </a:ext>
           </a:extLst>
         </p:spPr>
@@ -1859,7 +1859,7 @@
           </a:prstGeom>
           <a:extLst>
             <a:ext uri="{C572A759-6A51-4108-AA02-DFA0A04FC94B}">
-              <ma14:wrappingTextBoxFlag xmlns="" xmlns:ma14="http://schemas.microsoft.com/office/mac/drawingml/2011/main" val="0"/>
+              <ma14:wrappingTextBoxFlag xmlns:ma14="http://schemas.microsoft.com/office/mac/drawingml/2011/main" xmlns="" val="0"/>
             </a:ext>
           </a:extLst>
         </p:spPr>
@@ -4030,7 +4030,7 @@
         <p:spPr>
           <a:xfrm>
             <a:off x="8565005" y="2119074"/>
-            <a:ext cx="3255518" cy="2400657"/>
+            <a:ext cx="3255518" cy="2954655"/>
           </a:xfrm>
           <a:prstGeom prst="rect">
             <a:avLst/>
@@ -4095,6 +4095,20 @@
                 </a:solidFill>
               </a:rPr>
               <a:t>Kiro AI-DLC: 1355 Credits ($27.10)</a:t>
+            </a:r>
+          </a:p>
+          <a:p>
+            <a:pPr marL="285750" indent="-285750">
+              <a:buFont typeface="Arial" panose="020B0604020202020204" pitchFamily="34" charset="0"/>
+              <a:buChar char="•"/>
+            </a:pPr>
+            <a:r>
+              <a:rPr lang="en-US" dirty="0">
+                <a:solidFill>
+                  <a:schemeClr val="bg1"/>
+                </a:solidFill>
+              </a:rPr>
+              <a:t>LLM usage</a:t>
             </a:r>
           </a:p>
           <a:p>
@@ -4184,7 +4198,7 @@
         </p:blipFill>
         <p:spPr>
           <a:xfrm>
-            <a:off x="8565005" y="4243467"/>
+            <a:off x="8681546" y="5103958"/>
             <a:ext cx="3266816" cy="552527"/>
           </a:xfrm>
           <a:prstGeom prst="rect">
@@ -24126,7 +24140,7 @@
           </a:prstGeom>
           <a:extLst>
             <a:ext uri="{C572A759-6A51-4108-AA02-DFA0A04FC94B}">
-              <ma14:wrappingTextBoxFlag xmlns="" xmlns:ma14="http://schemas.microsoft.com/office/mac/drawingml/2011/main" val="0"/>
+              <ma14:wrappingTextBoxFlag xmlns:ma14="http://schemas.microsoft.com/office/mac/drawingml/2011/main" xmlns="" val="0"/>
             </a:ext>
           </a:extLst>
         </p:spPr>
@@ -25125,7 +25139,7 @@
           </a:prstGeom>
           <a:extLst>
             <a:ext uri="{C572A759-6A51-4108-AA02-DFA0A04FC94B}">
-              <ma14:wrappingTextBoxFlag xmlns="" xmlns:ma14="http://schemas.microsoft.com/office/mac/drawingml/2011/main" val="0"/>
+              <ma14:wrappingTextBoxFlag xmlns:ma14="http://schemas.microsoft.com/office/mac/drawingml/2011/main" xmlns="" val="0"/>
             </a:ext>
           </a:extLst>
         </p:spPr>
@@ -26270,7 +26284,7 @@
           </a:prstGeom>
           <a:extLst>
             <a:ext uri="{C572A759-6A51-4108-AA02-DFA0A04FC94B}">
-              <ma14:wrappingTextBoxFlag xmlns="" xmlns:ma14="http://schemas.microsoft.com/office/mac/drawingml/2011/main" val="0"/>
+              <ma14:wrappingTextBoxFlag xmlns:ma14="http://schemas.microsoft.com/office/mac/drawingml/2011/main" xmlns="" val="0"/>
             </a:ext>
           </a:extLst>
         </p:spPr>
@@ -27453,7 +27467,7 @@
           </a:prstGeom>
           <a:extLst>
             <a:ext uri="{C572A759-6A51-4108-AA02-DFA0A04FC94B}">
-              <ma14:wrappingTextBoxFlag xmlns="" xmlns:ma14="http://schemas.microsoft.com/office/mac/drawingml/2011/main" val="0"/>
+              <ma14:wrappingTextBoxFlag xmlns:ma14="http://schemas.microsoft.com/office/mac/drawingml/2011/main" xmlns="" val="0"/>
             </a:ext>
           </a:extLst>
         </p:spPr>
@@ -28208,7 +28222,7 @@
           </a:prstGeom>
           <a:extLst>
             <a:ext uri="{C572A759-6A51-4108-AA02-DFA0A04FC94B}">
-              <ma14:wrappingTextBoxFlag xmlns="" xmlns:ma14="http://schemas.microsoft.com/office/mac/drawingml/2011/main" val="0"/>
+              <ma14:wrappingTextBoxFlag xmlns:ma14="http://schemas.microsoft.com/office/mac/drawingml/2011/main" xmlns="" val="0"/>
             </a:ext>
           </a:extLst>
         </p:spPr>
@@ -28362,7 +28376,7 @@
         </p:spPr>
         <p:txBody>
           <a:bodyPr wrap="square" lIns="254" tIns="254" rIns="254" bIns="254" rtlCol="0" anchor="t">
-            <a:normAutofit/>
+            <a:noAutofit/>
           </a:bodyPr>
           <a:lstStyle/>
           <a:p>
@@ -28389,7 +28403,7 @@
         </p:nvSpPr>
         <p:spPr>
           <a:xfrm>
-            <a:off x="868680" y="2450592"/>
+            <a:off x="868680" y="2705116"/>
             <a:ext cx="1508760" cy="256032"/>
           </a:xfrm>
           <a:prstGeom prst="rect">
@@ -28427,7 +28441,7 @@
         </p:nvSpPr>
         <p:spPr>
           <a:xfrm>
-            <a:off x="868680" y="2734056"/>
+            <a:off x="868680" y="2988580"/>
             <a:ext cx="1508760" cy="201168"/>
           </a:xfrm>
           <a:prstGeom prst="rect">
@@ -28465,7 +28479,7 @@
         </p:nvSpPr>
         <p:spPr>
           <a:xfrm>
-            <a:off x="2423160" y="2496312"/>
+            <a:off x="2423160" y="2750836"/>
             <a:ext cx="100584" cy="292608"/>
           </a:xfrm>
           <a:prstGeom prst="rect">
@@ -28499,7 +28513,7 @@
         </p:nvSpPr>
         <p:spPr>
           <a:xfrm>
-            <a:off x="2596896" y="2468880"/>
+            <a:off x="2596896" y="2723404"/>
             <a:ext cx="749808" cy="256032"/>
           </a:xfrm>
           <a:prstGeom prst="rect">
@@ -28537,7 +28551,7 @@
         </p:nvSpPr>
         <p:spPr>
           <a:xfrm>
-            <a:off x="868680" y="3273552"/>
+            <a:off x="868680" y="3528076"/>
             <a:ext cx="1508760" cy="256032"/>
           </a:xfrm>
           <a:prstGeom prst="rect">
@@ -28575,7 +28589,7 @@
         </p:nvSpPr>
         <p:spPr>
           <a:xfrm>
-            <a:off x="868680" y="3557016"/>
+            <a:off x="868680" y="3811540"/>
             <a:ext cx="1508760" cy="201168"/>
           </a:xfrm>
           <a:prstGeom prst="rect">
@@ -28613,7 +28627,7 @@
         </p:nvSpPr>
         <p:spPr>
           <a:xfrm>
-            <a:off x="2423160" y="3319272"/>
+            <a:off x="2423160" y="3573796"/>
             <a:ext cx="306178" cy="292608"/>
           </a:xfrm>
           <a:prstGeom prst="rect">
@@ -28647,7 +28661,7 @@
         </p:nvSpPr>
         <p:spPr>
           <a:xfrm>
-            <a:off x="2802490" y="3291840"/>
+            <a:off x="2802490" y="3546364"/>
             <a:ext cx="749808" cy="256032"/>
           </a:xfrm>
           <a:prstGeom prst="rect">
@@ -28685,7 +28699,7 @@
         </p:nvSpPr>
         <p:spPr>
           <a:xfrm>
-            <a:off x="868680" y="4096512"/>
+            <a:off x="868680" y="4351036"/>
             <a:ext cx="1508760" cy="256032"/>
           </a:xfrm>
           <a:prstGeom prst="rect">
@@ -28723,7 +28737,7 @@
         </p:nvSpPr>
         <p:spPr>
           <a:xfrm>
-            <a:off x="868680" y="4379976"/>
+            <a:off x="868680" y="4634500"/>
             <a:ext cx="1508760" cy="201168"/>
           </a:xfrm>
           <a:prstGeom prst="rect">
@@ -28761,7 +28775,7 @@
         </p:nvSpPr>
         <p:spPr>
           <a:xfrm>
-            <a:off x="2423160" y="4142232"/>
+            <a:off x="2423160" y="4396756"/>
             <a:ext cx="5806440" cy="292608"/>
           </a:xfrm>
           <a:prstGeom prst="rect">
@@ -28795,7 +28809,7 @@
         </p:nvSpPr>
         <p:spPr>
           <a:xfrm>
-            <a:off x="8302752" y="4114800"/>
+            <a:off x="8302752" y="4369324"/>
             <a:ext cx="749808" cy="256032"/>
           </a:xfrm>
           <a:prstGeom prst="rect">
@@ -28833,7 +28847,7 @@
         </p:nvSpPr>
         <p:spPr>
           <a:xfrm>
-            <a:off x="868680" y="4919472"/>
+            <a:off x="868680" y="5173996"/>
             <a:ext cx="1508760" cy="256032"/>
           </a:xfrm>
           <a:prstGeom prst="rect">
@@ -28871,7 +28885,7 @@
         </p:nvSpPr>
         <p:spPr>
           <a:xfrm>
-            <a:off x="868680" y="5202936"/>
+            <a:off x="868680" y="5457460"/>
             <a:ext cx="1508760" cy="201168"/>
           </a:xfrm>
           <a:prstGeom prst="rect">
@@ -28909,7 +28923,7 @@
         </p:nvSpPr>
         <p:spPr>
           <a:xfrm>
-            <a:off x="2423160" y="4965192"/>
+            <a:off x="2423160" y="5219716"/>
             <a:ext cx="100584" cy="292608"/>
           </a:xfrm>
           <a:prstGeom prst="rect">
@@ -28943,7 +28957,7 @@
         </p:nvSpPr>
         <p:spPr>
           <a:xfrm>
-            <a:off x="2596896" y="4937760"/>
+            <a:off x="2596896" y="5192284"/>
             <a:ext cx="749808" cy="256032"/>
           </a:xfrm>
           <a:prstGeom prst="rect">
@@ -28981,7 +28995,7 @@
         </p:nvSpPr>
         <p:spPr>
           <a:xfrm>
-            <a:off x="9491472" y="2340864"/>
+            <a:off x="9491472" y="2010925"/>
             <a:ext cx="2029968" cy="804672"/>
           </a:xfrm>
           <a:prstGeom prst="roundRect">
@@ -29041,7 +29055,7 @@
         </p:nvSpPr>
         <p:spPr>
           <a:xfrm>
-            <a:off x="9491472" y="3401568"/>
+            <a:off x="9491472" y="3071629"/>
             <a:ext cx="2029968" cy="1078992"/>
           </a:xfrm>
           <a:prstGeom prst="roundRect">
@@ -29101,7 +29115,7 @@
         </p:nvSpPr>
         <p:spPr>
           <a:xfrm>
-            <a:off x="9491472" y="4791456"/>
+            <a:off x="9491472" y="4461517"/>
             <a:ext cx="2029968" cy="804672"/>
           </a:xfrm>
           <a:prstGeom prst="roundRect">
@@ -29211,7 +29225,7 @@
           </a:prstGeom>
           <a:extLst>
             <a:ext uri="{C572A759-6A51-4108-AA02-DFA0A04FC94B}">
-              <ma14:wrappingTextBoxFlag xmlns="" xmlns:ma14="http://schemas.microsoft.com/office/mac/drawingml/2011/main" val="0"/>
+              <ma14:wrappingTextBoxFlag xmlns:ma14="http://schemas.microsoft.com/office/mac/drawingml/2011/main" xmlns="" val="0"/>
             </a:ext>
           </a:extLst>
         </p:spPr>
@@ -29236,6 +29250,167 @@
               <a:t>24</a:t>
             </a:fld>
             <a:endParaRPr lang="en-US"/>
+          </a:p>
+        </p:txBody>
+      </p:sp>
+      <p:sp>
+        <p:nvSpPr>
+          <p:cNvPr id="26" name="TextBox 25">
+            <a:extLst>
+              <a:ext uri="{FF2B5EF4-FFF2-40B4-BE49-F238E27FC236}">
+                <a16:creationId xmlns:a16="http://schemas.microsoft.com/office/drawing/2014/main" id="{F7AC91D0-748C-F4ED-345A-5602635F7B51}"/>
+              </a:ext>
+            </a:extLst>
+          </p:cNvPr>
+          <p:cNvSpPr txBox="1"/>
+          <p:nvPr/>
+        </p:nvSpPr>
+        <p:spPr>
+          <a:xfrm>
+            <a:off x="621792" y="2039112"/>
+            <a:ext cx="8353313" cy="579120"/>
+          </a:xfrm>
+          <a:prstGeom prst="rect">
+            <a:avLst/>
+          </a:prstGeom>
+          <a:noFill/>
+          <a:ln/>
+        </p:spPr>
+        <p:txBody>
+          <a:bodyPr wrap="square" lIns="254" tIns="254" rIns="254" bIns="254" rtlCol="0" anchor="t">
+            <a:noAutofit/>
+          </a:bodyPr>
+          <a:lstStyle>
+            <a:lvl1pPr indent="0">
+              <a:buNone/>
+              <a:defRPr sz="1650">
+                <a:solidFill>
+                  <a:srgbClr val="B2BAC8"/>
+                </a:solidFill>
+              </a:defRPr>
+            </a:lvl1pPr>
+          </a:lstStyle>
+          <a:p>
+            <a:r>
+              <a:rPr lang="en-US" dirty="0"/>
+              <a:t>LLM selection must be evaluated and optimized. Costs and output quality differ for LLMs such as Claude Sonnet 4.6 vs Amazon Nova Pro and need to be evaluated.</a:t>
+            </a:r>
+          </a:p>
+        </p:txBody>
+      </p:sp>
+      <p:sp>
+        <p:nvSpPr>
+          <p:cNvPr id="28" name="Text 21">
+            <a:extLst>
+              <a:ext uri="{FF2B5EF4-FFF2-40B4-BE49-F238E27FC236}">
+                <a16:creationId xmlns:a16="http://schemas.microsoft.com/office/drawing/2014/main" id="{17E9A415-328C-242B-C7B6-44FF0341E3A8}"/>
+              </a:ext>
+            </a:extLst>
+          </p:cNvPr>
+          <p:cNvSpPr/>
+          <p:nvPr/>
+        </p:nvSpPr>
+        <p:spPr>
+          <a:xfrm>
+            <a:off x="9501747" y="5526024"/>
+            <a:ext cx="2029968" cy="804672"/>
+          </a:xfrm>
+          <a:prstGeom prst="roundRect">
+            <a:avLst>
+              <a:gd name="adj" fmla="val 9091"/>
+            </a:avLst>
+          </a:prstGeom>
+          <a:solidFill>
+            <a:srgbClr val="071A2D"/>
+          </a:solidFill>
+          <a:ln w="13970">
+            <a:solidFill>
+              <a:srgbClr val="B68CFF"/>
+            </a:solidFill>
+          </a:ln>
+        </p:spPr>
+        <p:txBody>
+          <a:bodyPr wrap="square" lIns="1016" tIns="1016" rIns="1016" bIns="1016" rtlCol="0" anchor="ctr">
+            <a:normAutofit/>
+          </a:bodyPr>
+          <a:lstStyle/>
+          <a:p>
+            <a:pPr algn="ctr"/>
+            <a:r>
+              <a:rPr lang="en-US" sz="1100" b="1" dirty="0">
+                <a:solidFill>
+                  <a:srgbClr val="F5F7FA"/>
+                </a:solidFill>
+              </a:rPr>
+              <a:t>S3 vector store</a:t>
+            </a:r>
+          </a:p>
+          <a:p>
+            <a:pPr algn="ctr"/>
+            <a:r>
+              <a:rPr lang="en-US" sz="1100" b="1" dirty="0">
+                <a:solidFill>
+                  <a:srgbClr val="F5F7FA"/>
+                </a:solidFill>
+              </a:rPr>
+              <a:t>keeps MVP cost near zero</a:t>
+            </a:r>
+          </a:p>
+        </p:txBody>
+      </p:sp>
+      <p:sp>
+        <p:nvSpPr>
+          <p:cNvPr id="30" name="Text 2">
+            <a:extLst>
+              <a:ext uri="{FF2B5EF4-FFF2-40B4-BE49-F238E27FC236}">
+                <a16:creationId xmlns:a16="http://schemas.microsoft.com/office/drawing/2014/main" id="{D2862B14-E8EA-A091-B5CD-68854CAECD61}"/>
+              </a:ext>
+            </a:extLst>
+          </p:cNvPr>
+          <p:cNvSpPr/>
+          <p:nvPr/>
+        </p:nvSpPr>
+        <p:spPr>
+          <a:xfrm>
+            <a:off x="899692" y="5815584"/>
+            <a:ext cx="8269291" cy="438912"/>
+          </a:xfrm>
+          <a:prstGeom prst="rect">
+            <a:avLst/>
+          </a:prstGeom>
+          <a:noFill/>
+          <a:ln/>
+        </p:spPr>
+        <p:txBody>
+          <a:bodyPr wrap="square" lIns="254" tIns="254" rIns="254" bIns="254" rtlCol="0" anchor="t">
+            <a:noAutofit/>
+          </a:bodyPr>
+          <a:lstStyle/>
+          <a:p>
+            <a:pPr marL="0" indent="0" algn="l">
+              <a:buNone/>
+            </a:pPr>
+            <a:r>
+              <a:rPr lang="en-US" sz="1200" dirty="0">
+                <a:solidFill>
+                  <a:schemeClr val="accent2"/>
+                </a:solidFill>
+              </a:rPr>
+              <a:t>Infrastructure only: LLM costs must be determined; cost and output will </a:t>
+            </a:r>
+            <a:r>
+              <a:rPr lang="en-US" sz="1200">
+                <a:solidFill>
+                  <a:schemeClr val="accent2"/>
+                </a:solidFill>
+              </a:rPr>
+              <a:t>vary by LLM.</a:t>
+            </a:r>
+            <a:endParaRPr lang="en-US" sz="1200" dirty="0">
+              <a:solidFill>
+                <a:schemeClr val="accent2"/>
+              </a:solidFill>
+            </a:endParaRPr>
           </a:p>
         </p:txBody>
       </p:sp>
@@ -30140,7 +30315,7 @@
           </a:prstGeom>
           <a:extLst>
             <a:ext uri="{C572A759-6A51-4108-AA02-DFA0A04FC94B}">
-              <ma14:wrappingTextBoxFlag xmlns="" xmlns:ma14="http://schemas.microsoft.com/office/mac/drawingml/2011/main" val="0"/>
+              <ma14:wrappingTextBoxFlag xmlns:ma14="http://schemas.microsoft.com/office/mac/drawingml/2011/main" xmlns="" val="0"/>
             </a:ext>
           </a:extLst>
         </p:spPr>
@@ -30950,7 +31125,7 @@
           </a:prstGeom>
           <a:extLst>
             <a:ext uri="{C572A759-6A51-4108-AA02-DFA0A04FC94B}">
-              <ma14:wrappingTextBoxFlag xmlns="" xmlns:ma14="http://schemas.microsoft.com/office/mac/drawingml/2011/main" val="0"/>
+              <ma14:wrappingTextBoxFlag xmlns:ma14="http://schemas.microsoft.com/office/mac/drawingml/2011/main" xmlns="" val="0"/>
             </a:ext>
           </a:extLst>
         </p:spPr>
@@ -31660,7 +31835,7 @@
           </a:prstGeom>
           <a:extLst>
             <a:ext uri="{C572A759-6A51-4108-AA02-DFA0A04FC94B}">
-              <ma14:wrappingTextBoxFlag xmlns="" xmlns:ma14="http://schemas.microsoft.com/office/mac/drawingml/2011/main" val="0"/>
+              <ma14:wrappingTextBoxFlag xmlns:ma14="http://schemas.microsoft.com/office/mac/drawingml/2011/main" xmlns="" val="0"/>
             </a:ext>
           </a:extLst>
         </p:spPr>
@@ -32447,7 +32622,7 @@
           </a:prstGeom>
           <a:extLst>
             <a:ext uri="{C572A759-6A51-4108-AA02-DFA0A04FC94B}">
-              <ma14:wrappingTextBoxFlag xmlns="" xmlns:ma14="http://schemas.microsoft.com/office/mac/drawingml/2011/main" val="0"/>
+              <ma14:wrappingTextBoxFlag xmlns:ma14="http://schemas.microsoft.com/office/mac/drawingml/2011/main" xmlns="" val="0"/>
             </a:ext>
           </a:extLst>
         </p:spPr>
@@ -33213,7 +33388,7 @@
           </a:prstGeom>
           <a:extLst>
             <a:ext uri="{C572A759-6A51-4108-AA02-DFA0A04FC94B}">
-              <ma14:wrappingTextBoxFlag xmlns="" xmlns:ma14="http://schemas.microsoft.com/office/mac/drawingml/2011/main" val="0"/>
+              <ma14:wrappingTextBoxFlag xmlns:ma14="http://schemas.microsoft.com/office/mac/drawingml/2011/main" xmlns="" val="0"/>
             </a:ext>
           </a:extLst>
         </p:spPr>
@@ -33866,7 +34041,7 @@
           </a:prstGeom>
           <a:extLst>
             <a:ext uri="{C572A759-6A51-4108-AA02-DFA0A04FC94B}">
-              <ma14:wrappingTextBoxFlag xmlns="" xmlns:ma14="http://schemas.microsoft.com/office/mac/drawingml/2011/main" val="0"/>
+              <ma14:wrappingTextBoxFlag xmlns:ma14="http://schemas.microsoft.com/office/mac/drawingml/2011/main" xmlns="" val="0"/>
             </a:ext>
           </a:extLst>
         </p:spPr>
@@ -34402,7 +34577,7 @@
           </a:prstGeom>
           <a:extLst>
             <a:ext uri="{C572A759-6A51-4108-AA02-DFA0A04FC94B}">
-              <ma14:wrappingTextBoxFlag xmlns="" xmlns:ma14="http://schemas.microsoft.com/office/mac/drawingml/2011/main" val="0"/>
+              <ma14:wrappingTextBoxFlag xmlns:ma14="http://schemas.microsoft.com/office/mac/drawingml/2011/main" xmlns="" val="0"/>
             </a:ext>
           </a:extLst>
         </p:spPr>
